--- a/09_meetings/HUNGARY_Sales_Review_2026/ISZE_HUNGARY_Sales_Review_FY2027_ModeA_only.pptx
+++ b/09_meetings/HUNGARY_Sales_Review_2026/ISZE_HUNGARY_Sales_Review_FY2027_ModeA_only.pptx
@@ -5645,6 +5645,34 @@
                 <a:latin typeface="Calibri"/>
               </a:rPr>
               <a:t>The chart is calendar years 2019–2026 only. 2026 is a working year-end estimate, not a fiscal-year figure.</a:t>
+            </a:r>
+          </a:p>
+          <a:p>
+            <a:pPr>
+              <a:lnSpc>
+                <a:spcPct val="125000"/>
+              </a:lnSpc>
+              <a:spcAft>
+                <a:spcPts val="1000"/>
+              </a:spcAft>
+            </a:pPr>
+            <a:r>
+              <a:rPr sz="1250" b="1">
+                <a:solidFill>
+                  <a:srgbClr val="CC0E1E"/>
+                </a:solidFill>
+                <a:latin typeface="Calibri"/>
+              </a:rPr>
+              <a:t>—  </a:t>
+            </a:r>
+            <a:r>
+              <a:rPr sz="1250">
+                <a:solidFill>
+                  <a:srgbClr val="1A1A1A"/>
+                </a:solidFill>
+                <a:latin typeface="Calibri"/>
+              </a:rPr>
+              <a:t>End-2026 mix: LCV / D-Max 3,645; CV — LD 0.</a:t>
             </a:r>
           </a:p>
           <a:p>

--- a/09_meetings/HUNGARY_Sales_Review_2026/ISZE_HUNGARY_Sales_Review_FY2027_ModeA_only.pptx
+++ b/09_meetings/HUNGARY_Sales_Review_2026/ISZE_HUNGARY_Sales_Review_FY2027_ModeA_only.pptx
@@ -10246,7 +10246,7 @@
                 </a:solidFill>
                 <a:latin typeface="Calibri"/>
               </a:rPr>
-              <a:t>Brake parts / Injectors / Turbo: agree which category we tackle first, and what the joint action is.</a:t>
+              <a:t>Brake parts / Steering / Turbo: agree which category we tackle first, and what the joint action is.</a:t>
             </a:r>
           </a:p>
           <a:p>
@@ -10678,7 +10678,7 @@
                 </a:solidFill>
                 <a:latin typeface="Calibri"/>
               </a:rPr>
-              <a:t>Parts Performance — Injectors</a:t>
+              <a:t>Parts Performance — Steering</a:t>
             </a:r>
           </a:p>
           <a:p>
@@ -11305,7 +11305,7 @@
                 </a:solidFill>
                 <a:latin typeface="Calibri"/>
               </a:rPr>
-              <a:t>Parts Performance — CY H1 2026 vs CY H1 2025</a:t>
+              <a:t>Parts Performance — CY H1 2026 vs CY H1 2025 (commercial, ex-warranty)</a:t>
             </a:r>
           </a:p>
         </p:txBody>
@@ -11536,7 +11536,7 @@
                 </a:solidFill>
                 <a:latin typeface="Calibri"/>
               </a:rPr>
-              <a:t>Parts billing EUR 171K against EUR 169K a year earlier — +0.9%. After EUR 1K of credit notes the net figure is EUR 170K.</a:t>
+              <a:t>Commercial parts billing (warranty/campaign excluded) EUR 123K against EUR 122K a year earlier — +0.3% (CY H1 2026 vs CY H1 2025, Jan–Jun).</a:t>
             </a:r>
           </a:p>
           <a:p>
@@ -11564,7 +11564,7 @@
                 </a:solidFill>
                 <a:latin typeface="Calibri"/>
               </a:rPr>
-              <a:t>Biggest declines: Brake parts EUR -9K; Injectors EUR -2K; Turbo EUR -1K.</a:t>
+              <a:t>Largest PN drops: 8983767550 (ROTOR; DISC BRK,FRT) EUR -6K, 79 fewer pcs; 8977993753 (LAMP ASM; HEAD) EUR -3K, 9 fewer pcs; 8975546610 (PAD KIT; CALIPER,DIS) [TF*] EUR -2K, 21 fewer pcs.</a:t>
             </a:r>
           </a:p>
           <a:p>
@@ -11592,7 +11592,7 @@
                 </a:solidFill>
                 <a:latin typeface="Calibri"/>
               </a:rPr>
-              <a:t>Growing: Air conditioning +39%, Electrical sensors +20%, Body parts +9%.</a:t>
+              <a:t>Largest PN gains: 8974995480 (FILTER; ACL) [TFR,TFS,UCR,UCS] EUR 3K, 154 more pcs; 1884057520 (T AXLE OIL  20L) EUR 2K, 14 more pcs; 8975595830 (PANEL; SIDE GATE) EUR 2K, 8 more pcs.</a:t>
             </a:r>
           </a:p>
           <a:p>
@@ -11620,7 +11620,7 @@
                 </a:solidFill>
                 <a:latin typeface="Calibri"/>
               </a:rPr>
-              <a:t>CY H1 2026 against CY H1 2025 (calendar Jan–Jun, Q1+Q2) — like-for-like half-year cut.</a:t>
+              <a:t>Credit notes of EUR 1K stay on the net bridge (net EUR 170K); not in the movers.</a:t>
             </a:r>
           </a:p>
         </p:txBody>
@@ -11783,7 +11783,7 @@
                 </a:solidFill>
                 <a:latin typeface="Calibri"/>
               </a:rPr>
-              <a:t>Brake parts — CY H1 2026 vs CY H1 2025</a:t>
+              <a:t>Brake parts — CY H1 2026 vs CY H1 2025 (commercial, ex-warranty)</a:t>
             </a:r>
           </a:p>
         </p:txBody>
@@ -11897,7 +11897,7 @@
               </a:spcAft>
             </a:pPr>
             <a:r>
-              <a:rPr sz="1400" b="1">
+              <a:rPr sz="1300" b="1">
                 <a:solidFill>
                   <a:srgbClr val="CC0E1E"/>
                 </a:solidFill>
@@ -11906,13 +11906,13 @@
               <a:t>—  </a:t>
             </a:r>
             <a:r>
-              <a:rPr sz="1400">
+              <a:rPr sz="1300">
                 <a:solidFill>
                   <a:srgbClr val="1A1A1A"/>
                 </a:solidFill>
                 <a:latin typeface="Calibri"/>
               </a:rPr>
-              <a:t>EUR 22,944 (CY H1 2025) to EUR 13,910 (CY H1 2026), down EUR 9,034 (-39%).</a:t>
+              <a:t>EUR 18,443 (CY H1 2025) to EUR 10,718 (CY H1 2026), down EUR 7,725 (-42%).</a:t>
             </a:r>
           </a:p>
           <a:p>
@@ -11925,7 +11925,7 @@
               </a:spcAft>
             </a:pPr>
             <a:r>
-              <a:rPr sz="1400" b="1">
+              <a:rPr sz="1300" b="1">
                 <a:solidFill>
                   <a:srgbClr val="CC0E1E"/>
                 </a:solidFill>
@@ -11934,13 +11934,13 @@
               <a:t>—  </a:t>
             </a:r>
             <a:r>
-              <a:rPr sz="1400">
+              <a:rPr sz="1300">
                 <a:solidFill>
                   <a:srgbClr val="1A1A1A"/>
                 </a:solidFill>
                 <a:latin typeface="Calibri"/>
               </a:rPr>
-              <a:t>8983767550 (ROTOR; DISC BRK,FRT): EUR 11,764 to EUR 5,544, 79 fewer pieces.</a:t>
+              <a:t>Largest part numbers driving the decline (by EUR):</a:t>
             </a:r>
           </a:p>
           <a:p>
@@ -11953,7 +11953,7 @@
               </a:spcAft>
             </a:pPr>
             <a:r>
-              <a:rPr sz="1400" b="1">
+              <a:rPr sz="1300" b="1">
                 <a:solidFill>
                   <a:srgbClr val="CC0E1E"/>
                 </a:solidFill>
@@ -11962,13 +11962,13 @@
               <a:t>—  </a:t>
             </a:r>
             <a:r>
-              <a:rPr sz="1400">
+              <a:rPr sz="1300">
                 <a:solidFill>
                   <a:srgbClr val="1A1A1A"/>
                 </a:solidFill>
                 <a:latin typeface="Calibri"/>
               </a:rPr>
-              <a:t>8975056801 (PAD KIT; CALIPER,DISC BRK,FRT): EUR 4,501 to EUR 2,561, 23 fewer pieces.</a:t>
+              <a:t>8983767550 (ROTOR; DISC BRK,FRT): EUR 11,764 to EUR 5,544, 79 fewer pieces.</a:t>
             </a:r>
           </a:p>
           <a:p>
@@ -11981,7 +11981,7 @@
               </a:spcAft>
             </a:pPr>
             <a:r>
-              <a:rPr sz="1400" b="1">
+              <a:rPr sz="1300" b="1">
                 <a:solidFill>
                   <a:srgbClr val="CC0E1E"/>
                 </a:solidFill>
@@ -11990,13 +11990,69 @@
               <a:t>—  </a:t>
             </a:r>
             <a:r>
-              <a:rPr sz="1400">
+              <a:rPr sz="1300">
                 <a:solidFill>
                   <a:srgbClr val="1A1A1A"/>
                 </a:solidFill>
                 <a:latin typeface="Calibri"/>
               </a:rPr>
-              <a:t>8975546610 (PAD KIT; CALIPER,DISC BRK,FRT): EUR 2,500 to EUR 742, 21 fewer pieces.</a:t>
+              <a:t>8975546610 (PAD KIT; CALIPER,DISC BRK,FRT · TF*): EUR 2,500 to EUR 742, 21 fewer pieces.</a:t>
+            </a:r>
+          </a:p>
+          <a:p>
+            <a:pPr>
+              <a:lnSpc>
+                <a:spcPct val="125000"/>
+              </a:lnSpc>
+              <a:spcAft>
+                <a:spcPts val="1000"/>
+              </a:spcAft>
+            </a:pPr>
+            <a:r>
+              <a:rPr sz="1300" b="1">
+                <a:solidFill>
+                  <a:srgbClr val="CC0E1E"/>
+                </a:solidFill>
+                <a:latin typeface="Calibri"/>
+              </a:rPr>
+              <a:t>—  </a:t>
+            </a:r>
+            <a:r>
+              <a:rPr sz="1300">
+                <a:solidFill>
+                  <a:srgbClr val="1A1A1A"/>
+                </a:solidFill>
+                <a:latin typeface="Calibri"/>
+              </a:rPr>
+              <a:t>8978279610 (PAD KIT; DISC BRK,W/O SHIM &amp; CLIP): EUR 2,015 to EUR 1,311, 10 fewer pieces.</a:t>
+            </a:r>
+          </a:p>
+          <a:p>
+            <a:pPr>
+              <a:lnSpc>
+                <a:spcPct val="125000"/>
+              </a:lnSpc>
+              <a:spcAft>
+                <a:spcPts val="1000"/>
+              </a:spcAft>
+            </a:pPr>
+            <a:r>
+              <a:rPr sz="1300" b="1">
+                <a:solidFill>
+                  <a:srgbClr val="CC0E1E"/>
+                </a:solidFill>
+                <a:latin typeface="Calibri"/>
+              </a:rPr>
+              <a:t>—  </a:t>
+            </a:r>
+            <a:r>
+              <a:rPr sz="1300">
+                <a:solidFill>
+                  <a:srgbClr val="1A1A1A"/>
+                </a:solidFill>
+                <a:latin typeface="Calibri"/>
+              </a:rPr>
+              <a:t>8976526220 (PAD KIT; CALIPER,DISC BRK,FRT): EUR 644 to EUR 0, 10 fewer pieces.</a:t>
             </a:r>
           </a:p>
         </p:txBody>
@@ -12266,7 +12322,7 @@
                 </a:solidFill>
                 <a:latin typeface="Calibri"/>
               </a:rPr>
-              <a:t>PARTS PERFORMANCE — INJECTORS</a:t>
+              <a:t>PARTS PERFORMANCE — STEERING</a:t>
             </a:r>
           </a:p>
         </p:txBody>
@@ -12301,7 +12357,7 @@
                 </a:solidFill>
                 <a:latin typeface="Calibri"/>
               </a:rPr>
-              <a:t>Injectors — CY H1 2026 vs CY H1 2025</a:t>
+              <a:t>Steering — CY H1 2026 vs CY H1 2025 (commercial, ex-warranty)</a:t>
             </a:r>
           </a:p>
         </p:txBody>
@@ -12415,7 +12471,7 @@
               </a:spcAft>
             </a:pPr>
             <a:r>
-              <a:rPr sz="1400" b="1">
+              <a:rPr sz="1300" b="1">
                 <a:solidFill>
                   <a:srgbClr val="CC0E1E"/>
                 </a:solidFill>
@@ -12424,13 +12480,13 @@
               <a:t>—  </a:t>
             </a:r>
             <a:r>
-              <a:rPr sz="1400">
+              <a:rPr sz="1300">
                 <a:solidFill>
                   <a:srgbClr val="1A1A1A"/>
                 </a:solidFill>
                 <a:latin typeface="Calibri"/>
               </a:rPr>
-              <a:t>EUR 3,090 (CY H1 2025) to EUR 1,525 (CY H1 2026), down EUR 1,565 (-51%).</a:t>
+              <a:t>EUR 2,096 (CY H1 2025) to EUR 991 (CY H1 2026), down EUR 1,105 (-53%).</a:t>
             </a:r>
           </a:p>
           <a:p>
@@ -12443,7 +12499,7 @@
               </a:spcAft>
             </a:pPr>
             <a:r>
-              <a:rPr sz="1400" b="1">
+              <a:rPr sz="1300" b="1">
                 <a:solidFill>
                   <a:srgbClr val="CC0E1E"/>
                 </a:solidFill>
@@ -12452,73 +12508,15 @@
               <a:t>—  </a:t>
             </a:r>
             <a:r>
-              <a:rPr sz="1400">
+              <a:rPr sz="1300">
                 <a:solidFill>
                   <a:srgbClr val="1A1A1A"/>
                 </a:solidFill>
                 <a:latin typeface="Calibri"/>
               </a:rPr>
-              <a:t>8983842670 (INJECTOR ASM; DEF DCM): EUR 2,051 to EUR 632, 9 fewer pieces.</a:t>
-            </a:r>
-          </a:p>
-        </p:txBody>
-      </p:sp>
-      <p:sp>
-        <p:nvSpPr>
-          <p:cNvPr id="9" name="TextBox 8"/>
-          <p:cNvSpPr txBox="1"/>
-          <p:nvPr/>
-        </p:nvSpPr>
-        <p:spPr>
-          <a:xfrm>
-            <a:off x="292608" y="3840480"/>
-            <a:ext cx="8595360" cy="274320"/>
-          </a:xfrm>
-          <a:prstGeom prst="rect">
-            <a:avLst/>
-          </a:prstGeom>
-          <a:noFill/>
-        </p:spPr>
-        <p:txBody>
-          <a:bodyPr wrap="square">
-            <a:spAutoFit/>
-          </a:bodyPr>
-          <a:lstStyle/>
-          <a:p>
-            <a:pPr algn="l"/>
-            <a:r>
-              <a:rPr sz="1300" b="1">
-                <a:solidFill>
-                  <a:srgbClr val="CC0E1E"/>
-                </a:solidFill>
-                <a:latin typeface="Calibri"/>
-              </a:rPr>
-              <a:t>Questions for us to work through together</a:t>
-            </a:r>
-          </a:p>
-        </p:txBody>
-      </p:sp>
-      <p:sp>
-        <p:nvSpPr>
-          <p:cNvPr id="10" name="TextBox 9"/>
-          <p:cNvSpPr txBox="1"/>
-          <p:nvPr/>
-        </p:nvSpPr>
-        <p:spPr>
-          <a:xfrm>
-            <a:off x="292608" y="4160520"/>
-            <a:ext cx="11612880" cy="1737360"/>
-          </a:xfrm>
-          <a:prstGeom prst="rect">
-            <a:avLst/>
-          </a:prstGeom>
-          <a:noFill/>
-        </p:spPr>
-        <p:txBody>
-          <a:bodyPr wrap="square">
-            <a:spAutoFit/>
-          </a:bodyPr>
-          <a:lstStyle/>
+              <a:t>Largest part numbers driving the decline (by EUR):</a:t>
+            </a:r>
+          </a:p>
           <a:p>
             <a:pPr>
               <a:lnSpc>
@@ -12529,7 +12527,7 @@
               </a:spcAft>
             </a:pPr>
             <a:r>
-              <a:rPr sz="1400" b="1">
+              <a:rPr sz="1300" b="1">
                 <a:solidFill>
                   <a:srgbClr val="CC0E1E"/>
                 </a:solidFill>
@@ -12538,13 +12536,13 @@
               <a:t>—  </a:t>
             </a:r>
             <a:r>
-              <a:rPr sz="1400">
+              <a:rPr sz="1300">
                 <a:solidFill>
                   <a:srgbClr val="1A1A1A"/>
                 </a:solidFill>
                 <a:latin typeface="Calibri"/>
               </a:rPr>
-              <a:t>Is this fewer failures, or repairs moving out of the network?</a:t>
+              <a:t>8979461321 (STEERING UNIT): EUR 624 to EUR 0, 1 fewer pieces.</a:t>
             </a:r>
           </a:p>
           <a:p>
@@ -12557,7 +12555,7 @@
               </a:spcAft>
             </a:pPr>
             <a:r>
-              <a:rPr sz="1400" b="1">
+              <a:rPr sz="1300" b="1">
                 <a:solidFill>
                   <a:srgbClr val="CC0E1E"/>
                 </a:solidFill>
@@ -12566,13 +12564,13 @@
               <a:t>—  </a:t>
             </a:r>
             <a:r>
-              <a:rPr sz="1400">
+              <a:rPr sz="1300">
                 <a:solidFill>
                   <a:srgbClr val="1A1A1A"/>
                 </a:solidFill>
                 <a:latin typeface="Calibri"/>
               </a:rPr>
-              <a:t>Is the exchange/reman route competing with new parts here?</a:t>
+              <a:t>8979461642 (PUMP ASM; OIL,P/S): EUR 465 to EUR 0, 2 fewer pieces.</a:t>
             </a:r>
           </a:p>
           <a:p>
@@ -12585,6 +12583,120 @@
               </a:spcAft>
             </a:pPr>
             <a:r>
+              <a:rPr sz="1300" b="1">
+                <a:solidFill>
+                  <a:srgbClr val="CC0E1E"/>
+                </a:solidFill>
+                <a:latin typeface="Calibri"/>
+              </a:rPr>
+              <a:t>—  </a:t>
+            </a:r>
+            <a:r>
+              <a:rPr sz="1300">
+                <a:solidFill>
+                  <a:srgbClr val="1A1A1A"/>
+                </a:solidFill>
+                <a:latin typeface="Calibri"/>
+              </a:rPr>
+              <a:t>7552338510 (KNUCKLE; FRT AXLE): EUR 257 to EUR 0, 1 fewer pieces.</a:t>
+            </a:r>
+          </a:p>
+          <a:p>
+            <a:pPr>
+              <a:lnSpc>
+                <a:spcPct val="125000"/>
+              </a:lnSpc>
+              <a:spcAft>
+                <a:spcPts val="1000"/>
+              </a:spcAft>
+            </a:pPr>
+            <a:r>
+              <a:rPr sz="1300" b="1">
+                <a:solidFill>
+                  <a:srgbClr val="CC0E1E"/>
+                </a:solidFill>
+                <a:latin typeface="Calibri"/>
+              </a:rPr>
+              <a:t>—  </a:t>
+            </a:r>
+            <a:r>
+              <a:rPr sz="1300">
+                <a:solidFill>
+                  <a:srgbClr val="1A1A1A"/>
+                </a:solidFill>
+                <a:latin typeface="Calibri"/>
+              </a:rPr>
+              <a:t>8983039040 (KNUCKLE; FRT AXLE): EUR 186 to EUR 0, 1 fewer pieces.</a:t>
+            </a:r>
+          </a:p>
+        </p:txBody>
+      </p:sp>
+      <p:sp>
+        <p:nvSpPr>
+          <p:cNvPr id="9" name="TextBox 8"/>
+          <p:cNvSpPr txBox="1"/>
+          <p:nvPr/>
+        </p:nvSpPr>
+        <p:spPr>
+          <a:xfrm>
+            <a:off x="292608" y="3840480"/>
+            <a:ext cx="8595360" cy="274320"/>
+          </a:xfrm>
+          <a:prstGeom prst="rect">
+            <a:avLst/>
+          </a:prstGeom>
+          <a:noFill/>
+        </p:spPr>
+        <p:txBody>
+          <a:bodyPr wrap="square">
+            <a:spAutoFit/>
+          </a:bodyPr>
+          <a:lstStyle/>
+          <a:p>
+            <a:pPr algn="l"/>
+            <a:r>
+              <a:rPr sz="1300" b="1">
+                <a:solidFill>
+                  <a:srgbClr val="CC0E1E"/>
+                </a:solidFill>
+                <a:latin typeface="Calibri"/>
+              </a:rPr>
+              <a:t>Questions for us to work through together</a:t>
+            </a:r>
+          </a:p>
+        </p:txBody>
+      </p:sp>
+      <p:sp>
+        <p:nvSpPr>
+          <p:cNvPr id="10" name="TextBox 9"/>
+          <p:cNvSpPr txBox="1"/>
+          <p:nvPr/>
+        </p:nvSpPr>
+        <p:spPr>
+          <a:xfrm>
+            <a:off x="292608" y="4160520"/>
+            <a:ext cx="11612880" cy="1737360"/>
+          </a:xfrm>
+          <a:prstGeom prst="rect">
+            <a:avLst/>
+          </a:prstGeom>
+          <a:noFill/>
+        </p:spPr>
+        <p:txBody>
+          <a:bodyPr wrap="square">
+            <a:spAutoFit/>
+          </a:bodyPr>
+          <a:lstStyle/>
+          <a:p>
+            <a:pPr>
+              <a:lnSpc>
+                <a:spcPct val="125000"/>
+              </a:lnSpc>
+              <a:spcAft>
+                <a:spcPts val="1000"/>
+              </a:spcAft>
+            </a:pPr>
+            <a:r>
               <a:rPr sz="1400" b="1">
                 <a:solidFill>
                   <a:srgbClr val="CC0E1E"/>
@@ -12600,7 +12712,63 @@
                 </a:solidFill>
                 <a:latin typeface="Calibri"/>
               </a:rPr>
-              <a:t>Are dealers still quoting these part numbers, or have they dropped off the workshop menu?</a:t>
+              <a:t>Is this pricing against what the dealers can buy locally?</a:t>
+            </a:r>
+          </a:p>
+          <a:p>
+            <a:pPr>
+              <a:lnSpc>
+                <a:spcPct val="125000"/>
+              </a:lnSpc>
+              <a:spcAft>
+                <a:spcPts val="1000"/>
+              </a:spcAft>
+            </a:pPr>
+            <a:r>
+              <a:rPr sz="1400" b="1">
+                <a:solidFill>
+                  <a:srgbClr val="CC0E1E"/>
+                </a:solidFill>
+                <a:latin typeface="Calibri"/>
+              </a:rPr>
+              <a:t>—  </a:t>
+            </a:r>
+            <a:r>
+              <a:rPr sz="1400">
+                <a:solidFill>
+                  <a:srgbClr val="1A1A1A"/>
+                </a:solidFill>
+                <a:latin typeface="Calibri"/>
+              </a:rPr>
+              <a:t>Is any of this stock timing on your side rather than end demand?</a:t>
+            </a:r>
+          </a:p>
+          <a:p>
+            <a:pPr>
+              <a:lnSpc>
+                <a:spcPct val="125000"/>
+              </a:lnSpc>
+              <a:spcAft>
+                <a:spcPts val="1000"/>
+              </a:spcAft>
+            </a:pPr>
+            <a:r>
+              <a:rPr sz="1400" b="1">
+                <a:solidFill>
+                  <a:srgbClr val="CC0E1E"/>
+                </a:solidFill>
+                <a:latin typeface="Calibri"/>
+              </a:rPr>
+              <a:t>—  </a:t>
+            </a:r>
+            <a:r>
+              <a:rPr sz="1400">
+                <a:solidFill>
+                  <a:srgbClr val="1A1A1A"/>
+                </a:solidFill>
+                <a:latin typeface="Calibri"/>
+              </a:rPr>
+              <a:t>What would make the biggest difference to keep this business with us?</a:t>
             </a:r>
           </a:p>
         </p:txBody>
@@ -12763,7 +12931,7 @@
                 </a:solidFill>
                 <a:latin typeface="Calibri"/>
               </a:rPr>
-              <a:t>Turbo — CY H1 2026 vs CY H1 2025</a:t>
+              <a:t>Turbo — CY H1 2026 vs CY H1 2025 (commercial, ex-warranty)</a:t>
             </a:r>
           </a:p>
         </p:txBody>
@@ -12877,7 +13045,7 @@
               </a:spcAft>
             </a:pPr>
             <a:r>
-              <a:rPr sz="1400" b="1">
+              <a:rPr sz="1300" b="1">
                 <a:solidFill>
                   <a:srgbClr val="CC0E1E"/>
                 </a:solidFill>
@@ -12886,13 +13054,153 @@
               <a:t>—  </a:t>
             </a:r>
             <a:r>
-              <a:rPr sz="1400">
+              <a:rPr sz="1300">
                 <a:solidFill>
                   <a:srgbClr val="1A1A1A"/>
                 </a:solidFill>
                 <a:latin typeface="Calibri"/>
               </a:rPr>
               <a:t>EUR 1,059 (CY H1 2025) to EUR 12 (CY H1 2026), down EUR 1,047 (-99%).</a:t>
+            </a:r>
+          </a:p>
+          <a:p>
+            <a:pPr>
+              <a:lnSpc>
+                <a:spcPct val="125000"/>
+              </a:lnSpc>
+              <a:spcAft>
+                <a:spcPts val="1000"/>
+              </a:spcAft>
+            </a:pPr>
+            <a:r>
+              <a:rPr sz="1300" b="1">
+                <a:solidFill>
+                  <a:srgbClr val="CC0E1E"/>
+                </a:solidFill>
+                <a:latin typeface="Calibri"/>
+              </a:rPr>
+              <a:t>—  </a:t>
+            </a:r>
+            <a:r>
+              <a:rPr sz="1300">
+                <a:solidFill>
+                  <a:srgbClr val="1A1A1A"/>
+                </a:solidFill>
+                <a:latin typeface="Calibri"/>
+              </a:rPr>
+              <a:t>Largest part numbers driving the decline (by EUR):</a:t>
+            </a:r>
+          </a:p>
+          <a:p>
+            <a:pPr>
+              <a:lnSpc>
+                <a:spcPct val="125000"/>
+              </a:lnSpc>
+              <a:spcAft>
+                <a:spcPts val="1000"/>
+              </a:spcAft>
+            </a:pPr>
+            <a:r>
+              <a:rPr sz="1300" b="1">
+                <a:solidFill>
+                  <a:srgbClr val="CC0E1E"/>
+                </a:solidFill>
+                <a:latin typeface="Calibri"/>
+              </a:rPr>
+              <a:t>—  </a:t>
+            </a:r>
+            <a:r>
+              <a:rPr sz="1300">
+                <a:solidFill>
+                  <a:srgbClr val="1A1A1A"/>
+                </a:solidFill>
+                <a:latin typeface="Calibri"/>
+              </a:rPr>
+              <a:t>8974985741 (TURBOCHARGER ASM): EUR 857 to EUR 0, 1 fewer pieces.</a:t>
+            </a:r>
+          </a:p>
+          <a:p>
+            <a:pPr>
+              <a:lnSpc>
+                <a:spcPct val="125000"/>
+              </a:lnSpc>
+              <a:spcAft>
+                <a:spcPts val="1000"/>
+              </a:spcAft>
+            </a:pPr>
+            <a:r>
+              <a:rPr sz="1300" b="1">
+                <a:solidFill>
+                  <a:srgbClr val="CC0E1E"/>
+                </a:solidFill>
+                <a:latin typeface="Calibri"/>
+              </a:rPr>
+              <a:t>—  </a:t>
+            </a:r>
+            <a:r>
+              <a:rPr sz="1300">
+                <a:solidFill>
+                  <a:srgbClr val="1A1A1A"/>
+                </a:solidFill>
+                <a:latin typeface="Calibri"/>
+              </a:rPr>
+              <a:t>8975334720 (PIPE; OIL RETURN,TURBOCHARGER): EUR 119 to EUR 0, 2 fewer pieces.</a:t>
+            </a:r>
+          </a:p>
+          <a:p>
+            <a:pPr>
+              <a:lnSpc>
+                <a:spcPct val="125000"/>
+              </a:lnSpc>
+              <a:spcAft>
+                <a:spcPts val="1000"/>
+              </a:spcAft>
+            </a:pPr>
+            <a:r>
+              <a:rPr sz="1300" b="1">
+                <a:solidFill>
+                  <a:srgbClr val="CC0E1E"/>
+                </a:solidFill>
+                <a:latin typeface="Calibri"/>
+              </a:rPr>
+              <a:t>—  </a:t>
+            </a:r>
+            <a:r>
+              <a:rPr sz="1300">
+                <a:solidFill>
+                  <a:srgbClr val="1A1A1A"/>
+                </a:solidFill>
+                <a:latin typeface="Calibri"/>
+              </a:rPr>
+              <a:t>8981993530 (SENSOR; TURBOCHARGER): EUR 48 to EUR 0, 1 fewer pieces.</a:t>
+            </a:r>
+          </a:p>
+          <a:p>
+            <a:pPr>
+              <a:lnSpc>
+                <a:spcPct val="125000"/>
+              </a:lnSpc>
+              <a:spcAft>
+                <a:spcPts val="1000"/>
+              </a:spcAft>
+            </a:pPr>
+            <a:r>
+              <a:rPr sz="1300" b="1">
+                <a:solidFill>
+                  <a:srgbClr val="CC0E1E"/>
+                </a:solidFill>
+                <a:latin typeface="Calibri"/>
+              </a:rPr>
+              <a:t>—  </a:t>
+            </a:r>
+            <a:r>
+              <a:rPr sz="1300">
+                <a:solidFill>
+                  <a:srgbClr val="1A1A1A"/>
+                </a:solidFill>
+                <a:latin typeface="Calibri"/>
+              </a:rPr>
+              <a:t>8982480882 (GASKET; TURBOCHARGER TO EXH MANIF): EUR 20 to EUR 0, 5 fewer pieces.</a:t>
             </a:r>
           </a:p>
         </p:txBody>
@@ -13197,7 +13505,7 @@
                 </a:solidFill>
                 <a:latin typeface="Calibri"/>
               </a:rPr>
-              <a:t>Where volume grew — CY H1 2026 vs CY H1 2025</a:t>
+              <a:t>Where volume grew — CY H1 2026 vs CY H1 2025 (commercial, ex-warranty)</a:t>
             </a:r>
           </a:p>
         </p:txBody>
@@ -13299,10 +13607,12 @@
                 <a:tableStyleId>{5C22544A-7EE6-4342-B048-85BDC9FD1C3A}</a:tableStyleId>
               </a:tblPr>
               <a:tblGrid>
-                <a:gridCol w="2194560"/>
-                <a:gridCol w="4480560"/>
-                <a:gridCol w="2468880"/>
-                <a:gridCol w="2468880"/>
+                <a:gridCol w="1737360"/>
+                <a:gridCol w="2926080"/>
+                <a:gridCol w="1645920"/>
+                <a:gridCol w="1737360"/>
+                <a:gridCol w="1737360"/>
+                <a:gridCol w="1828800"/>
               </a:tblGrid>
               <a:tr h="339634">
                 <a:tc>
@@ -13312,7 +13622,7 @@
                     <a:p>
                       <a:pPr algn="l"/>
                       <a:r>
-                        <a:rPr sz="1200" b="1">
+                        <a:rPr sz="1100" b="1">
                           <a:solidFill>
                             <a:srgbClr val="FFFFFF"/>
                           </a:solidFill>
@@ -13335,7 +13645,7 @@
                     <a:p>
                       <a:pPr algn="l"/>
                       <a:r>
-                        <a:rPr sz="1200" b="1">
+                        <a:rPr sz="1100" b="1">
                           <a:solidFill>
                             <a:srgbClr val="FFFFFF"/>
                           </a:solidFill>
@@ -13356,9 +13666,32 @@
                     <a:bodyPr/>
                     <a:lstStyle/>
                     <a:p>
+                      <a:pPr algn="l"/>
+                      <a:r>
+                        <a:rPr sz="1100" b="1">
+                          <a:solidFill>
+                            <a:srgbClr val="FFFFFF"/>
+                          </a:solidFill>
+                          <a:latin typeface="Calibri"/>
+                        </a:rPr>
+                        <a:t>Model</a:t>
+                      </a:r>
+                    </a:p>
+                  </a:txBody>
+                  <a:tcPr anchor="ctr" marL="73152" marR="73152">
+                    <a:solidFill>
+                      <a:srgbClr val="CC0E1E"/>
+                    </a:solidFill>
+                  </a:tcPr>
+                </a:tc>
+                <a:tc>
+                  <a:txBody>
+                    <a:bodyPr/>
+                    <a:lstStyle/>
+                    <a:p>
                       <a:pPr algn="r"/>
                       <a:r>
-                        <a:rPr sz="1200" b="1">
+                        <a:rPr sz="1100" b="1">
                           <a:solidFill>
                             <a:srgbClr val="FFFFFF"/>
                           </a:solidFill>
@@ -13381,13 +13714,36 @@
                     <a:p>
                       <a:pPr algn="r"/>
                       <a:r>
-                        <a:rPr sz="1200" b="1">
+                        <a:rPr sz="1100" b="1">
                           <a:solidFill>
                             <a:srgbClr val="FFFFFF"/>
                           </a:solidFill>
                           <a:latin typeface="Calibri"/>
                         </a:rPr>
                         <a:t>CY H1 2026</a:t>
+                      </a:r>
+                    </a:p>
+                  </a:txBody>
+                  <a:tcPr anchor="ctr" marL="73152" marR="73152">
+                    <a:solidFill>
+                      <a:srgbClr val="CC0E1E"/>
+                    </a:solidFill>
+                  </a:tcPr>
+                </a:tc>
+                <a:tc>
+                  <a:txBody>
+                    <a:bodyPr/>
+                    <a:lstStyle/>
+                    <a:p>
+                      <a:pPr algn="r"/>
+                      <a:r>
+                        <a:rPr sz="1100" b="1">
+                          <a:solidFill>
+                            <a:srgbClr val="FFFFFF"/>
+                          </a:solidFill>
+                          <a:latin typeface="Calibri"/>
+                        </a:rPr>
+                        <a:t>Δ EUR</a:t>
                       </a:r>
                     </a:p>
                   </a:txBody>
@@ -13406,7 +13762,7 @@
                     <a:p>
                       <a:pPr algn="l"/>
                       <a:r>
-                        <a:rPr sz="1200" b="0">
+                        <a:rPr sz="1100" b="0">
                           <a:solidFill>
                             <a:srgbClr val="1A1A1A"/>
                           </a:solidFill>
@@ -13429,7 +13785,7 @@
                     <a:p>
                       <a:pPr algn="l"/>
                       <a:r>
-                        <a:rPr sz="1200" b="0">
+                        <a:rPr sz="1100" b="0">
                           <a:solidFill>
                             <a:srgbClr val="1A1A1A"/>
                           </a:solidFill>
@@ -13450,9 +13806,32 @@
                     <a:bodyPr/>
                     <a:lstStyle/>
                     <a:p>
+                      <a:pPr algn="l"/>
+                      <a:r>
+                        <a:rPr sz="1100" b="0">
+                          <a:solidFill>
+                            <a:srgbClr val="1A1A1A"/>
+                          </a:solidFill>
+                          <a:latin typeface="Calibri"/>
+                        </a:rPr>
+                        <a:t>TFR,TFS,UCR,UCS</a:t>
+                      </a:r>
+                    </a:p>
+                  </a:txBody>
+                  <a:tcPr anchor="ctr" marL="73152" marR="73152">
+                    <a:solidFill>
+                      <a:srgbClr val="FFFFFF"/>
+                    </a:solidFill>
+                  </a:tcPr>
+                </a:tc>
+                <a:tc>
+                  <a:txBody>
+                    <a:bodyPr/>
+                    <a:lstStyle/>
+                    <a:p>
                       <a:pPr algn="r"/>
                       <a:r>
-                        <a:rPr sz="1200" b="0">
+                        <a:rPr sz="1100" b="0">
                           <a:solidFill>
                             <a:srgbClr val="1A1A1A"/>
                           </a:solidFill>
@@ -13475,13 +13854,36 @@
                     <a:p>
                       <a:pPr algn="r"/>
                       <a:r>
-                        <a:rPr sz="1200" b="0">
+                        <a:rPr sz="1100" b="0">
                           <a:solidFill>
                             <a:srgbClr val="1A1A1A"/>
                           </a:solidFill>
                           <a:latin typeface="Calibri"/>
                         </a:rPr>
                         <a:t>EUR 8,390</a:t>
+                      </a:r>
+                    </a:p>
+                  </a:txBody>
+                  <a:tcPr anchor="ctr" marL="73152" marR="73152">
+                    <a:solidFill>
+                      <a:srgbClr val="FFFFFF"/>
+                    </a:solidFill>
+                  </a:tcPr>
+                </a:tc>
+                <a:tc>
+                  <a:txBody>
+                    <a:bodyPr/>
+                    <a:lstStyle/>
+                    <a:p>
+                      <a:pPr algn="r"/>
+                      <a:r>
+                        <a:rPr sz="1100" b="0">
+                          <a:solidFill>
+                            <a:srgbClr val="1A1A1A"/>
+                          </a:solidFill>
+                          <a:latin typeface="Calibri"/>
+                        </a:rPr>
+                        <a:t>EUR 3,237</a:t>
                       </a:r>
                     </a:p>
                   </a:txBody>
@@ -13500,7 +13902,7 @@
                     <a:p>
                       <a:pPr algn="l"/>
                       <a:r>
-                        <a:rPr sz="1200" b="0">
+                        <a:rPr sz="1100" b="0">
                           <a:solidFill>
                             <a:srgbClr val="1A1A1A"/>
                           </a:solidFill>
@@ -13523,7 +13925,7 @@
                     <a:p>
                       <a:pPr algn="l"/>
                       <a:r>
-                        <a:rPr sz="1200" b="0">
+                        <a:rPr sz="1100" b="0">
                           <a:solidFill>
                             <a:srgbClr val="1A1A1A"/>
                           </a:solidFill>
@@ -13544,9 +13946,32 @@
                     <a:bodyPr/>
                     <a:lstStyle/>
                     <a:p>
+                      <a:pPr algn="l"/>
+                      <a:r>
+                        <a:rPr sz="1100" b="0">
+                          <a:solidFill>
+                            <a:srgbClr val="1A1A1A"/>
+                          </a:solidFill>
+                          <a:latin typeface="Calibri"/>
+                        </a:rPr>
+                        <a:t>—</a:t>
+                      </a:r>
+                    </a:p>
+                  </a:txBody>
+                  <a:tcPr anchor="ctr" marL="73152" marR="73152">
+                    <a:solidFill>
+                      <a:srgbClr val="ECECEC"/>
+                    </a:solidFill>
+                  </a:tcPr>
+                </a:tc>
+                <a:tc>
+                  <a:txBody>
+                    <a:bodyPr/>
+                    <a:lstStyle/>
+                    <a:p>
                       <a:pPr algn="r"/>
                       <a:r>
-                        <a:rPr sz="1200" b="0">
+                        <a:rPr sz="1100" b="0">
                           <a:solidFill>
                             <a:srgbClr val="1A1A1A"/>
                           </a:solidFill>
@@ -13569,13 +13994,36 @@
                     <a:p>
                       <a:pPr algn="r"/>
                       <a:r>
-                        <a:rPr sz="1200" b="0">
+                        <a:rPr sz="1100" b="0">
                           <a:solidFill>
                             <a:srgbClr val="1A1A1A"/>
                           </a:solidFill>
                           <a:latin typeface="Calibri"/>
                         </a:rPr>
                         <a:t>EUR 3,801</a:t>
+                      </a:r>
+                    </a:p>
+                  </a:txBody>
+                  <a:tcPr anchor="ctr" marL="73152" marR="73152">
+                    <a:solidFill>
+                      <a:srgbClr val="ECECEC"/>
+                    </a:solidFill>
+                  </a:tcPr>
+                </a:tc>
+                <a:tc>
+                  <a:txBody>
+                    <a:bodyPr/>
+                    <a:lstStyle/>
+                    <a:p>
+                      <a:pPr algn="r"/>
+                      <a:r>
+                        <a:rPr sz="1100" b="0">
+                          <a:solidFill>
+                            <a:srgbClr val="1A1A1A"/>
+                          </a:solidFill>
+                          <a:latin typeface="Calibri"/>
+                        </a:rPr>
+                        <a:t>EUR 2,098</a:t>
                       </a:r>
                     </a:p>
                   </a:txBody>
@@ -13594,13 +14042,13 @@
                     <a:p>
                       <a:pPr algn="l"/>
                       <a:r>
-                        <a:rPr sz="1200" b="0">
+                        <a:rPr sz="1100" b="0">
                           <a:solidFill>
                             <a:srgbClr val="1A1A1A"/>
                           </a:solidFill>
                           <a:latin typeface="Calibri"/>
                         </a:rPr>
-                        <a:t>7552348290</a:t>
+                        <a:t>8975595830</a:t>
                       </a:r>
                     </a:p>
                   </a:txBody>
@@ -13617,13 +14065,36 @@
                     <a:p>
                       <a:pPr algn="l"/>
                       <a:r>
-                        <a:rPr sz="1200" b="0">
+                        <a:rPr sz="1100" b="0">
                           <a:solidFill>
                             <a:srgbClr val="1A1A1A"/>
                           </a:solidFill>
                           <a:latin typeface="Calibri"/>
                         </a:rPr>
-                        <a:t>STEERING UNIT</a:t>
+                        <a:t>PANEL; SIDE GATE</a:t>
+                      </a:r>
+                    </a:p>
+                  </a:txBody>
+                  <a:tcPr anchor="ctr" marL="73152" marR="73152">
+                    <a:solidFill>
+                      <a:srgbClr val="FFFFFF"/>
+                    </a:solidFill>
+                  </a:tcPr>
+                </a:tc>
+                <a:tc>
+                  <a:txBody>
+                    <a:bodyPr/>
+                    <a:lstStyle/>
+                    <a:p>
+                      <a:pPr algn="l"/>
+                      <a:r>
+                        <a:rPr sz="1100" b="0">
+                          <a:solidFill>
+                            <a:srgbClr val="1A1A1A"/>
+                          </a:solidFill>
+                          <a:latin typeface="Calibri"/>
+                        </a:rPr>
+                        <a:t>—</a:t>
                       </a:r>
                     </a:p>
                   </a:txBody>
@@ -13640,13 +14111,13 @@
                     <a:p>
                       <a:pPr algn="r"/>
                       <a:r>
-                        <a:rPr sz="1200" b="0">
+                        <a:rPr sz="1100" b="0">
                           <a:solidFill>
                             <a:srgbClr val="1A1A1A"/>
                           </a:solidFill>
                           <a:latin typeface="Calibri"/>
                         </a:rPr>
-                        <a:t>EUR 19,839</a:t>
+                        <a:t>EUR 430</a:t>
                       </a:r>
                     </a:p>
                   </a:txBody>
@@ -13663,13 +14134,36 @@
                     <a:p>
                       <a:pPr algn="r"/>
                       <a:r>
-                        <a:rPr sz="1200" b="0">
+                        <a:rPr sz="1100" b="0">
                           <a:solidFill>
                             <a:srgbClr val="1A1A1A"/>
                           </a:solidFill>
                           <a:latin typeface="Calibri"/>
                         </a:rPr>
-                        <a:t>EUR 21,823</a:t>
+                        <a:t>EUR 2,130</a:t>
+                      </a:r>
+                    </a:p>
+                  </a:txBody>
+                  <a:tcPr anchor="ctr" marL="73152" marR="73152">
+                    <a:solidFill>
+                      <a:srgbClr val="FFFFFF"/>
+                    </a:solidFill>
+                  </a:tcPr>
+                </a:tc>
+                <a:tc>
+                  <a:txBody>
+                    <a:bodyPr/>
+                    <a:lstStyle/>
+                    <a:p>
+                      <a:pPr algn="r"/>
+                      <a:r>
+                        <a:rPr sz="1100" b="0">
+                          <a:solidFill>
+                            <a:srgbClr val="1A1A1A"/>
+                          </a:solidFill>
+                          <a:latin typeface="Calibri"/>
+                        </a:rPr>
+                        <a:t>EUR 1,700</a:t>
                       </a:r>
                     </a:p>
                   </a:txBody>
@@ -13688,13 +14182,13 @@
                     <a:p>
                       <a:pPr algn="l"/>
                       <a:r>
-                        <a:rPr sz="1200" b="0">
+                        <a:rPr sz="1100" b="0">
                           <a:solidFill>
                             <a:srgbClr val="1A1A1A"/>
                           </a:solidFill>
                           <a:latin typeface="Calibri"/>
                         </a:rPr>
-                        <a:t>8975595830</a:t>
+                        <a:t>8983320160</a:t>
                       </a:r>
                     </a:p>
                   </a:txBody>
@@ -13711,13 +14205,36 @@
                     <a:p>
                       <a:pPr algn="l"/>
                       <a:r>
-                        <a:rPr sz="1200" b="0">
+                        <a:rPr sz="1100" b="0">
                           <a:solidFill>
                             <a:srgbClr val="1A1A1A"/>
                           </a:solidFill>
                           <a:latin typeface="Calibri"/>
                         </a:rPr>
-                        <a:t>PANEL; SIDE GATE</a:t>
+                        <a:t>VALVE; EGR</a:t>
+                      </a:r>
+                    </a:p>
+                  </a:txBody>
+                  <a:tcPr anchor="ctr" marL="73152" marR="73152">
+                    <a:solidFill>
+                      <a:srgbClr val="ECECEC"/>
+                    </a:solidFill>
+                  </a:tcPr>
+                </a:tc>
+                <a:tc>
+                  <a:txBody>
+                    <a:bodyPr/>
+                    <a:lstStyle/>
+                    <a:p>
+                      <a:pPr algn="l"/>
+                      <a:r>
+                        <a:rPr sz="1100" b="0">
+                          <a:solidFill>
+                            <a:srgbClr val="1A1A1A"/>
+                          </a:solidFill>
+                          <a:latin typeface="Calibri"/>
+                        </a:rPr>
+                        <a:t>—</a:t>
                       </a:r>
                     </a:p>
                   </a:txBody>
@@ -13734,13 +14251,13 @@
                     <a:p>
                       <a:pPr algn="r"/>
                       <a:r>
-                        <a:rPr sz="1200" b="0">
+                        <a:rPr sz="1100" b="0">
                           <a:solidFill>
                             <a:srgbClr val="1A1A1A"/>
                           </a:solidFill>
                           <a:latin typeface="Calibri"/>
                         </a:rPr>
-                        <a:t>EUR 430</a:t>
+                        <a:t>EUR 220</a:t>
                       </a:r>
                     </a:p>
                   </a:txBody>
@@ -13757,13 +14274,36 @@
                     <a:p>
                       <a:pPr algn="r"/>
                       <a:r>
-                        <a:rPr sz="1200" b="0">
+                        <a:rPr sz="1100" b="0">
                           <a:solidFill>
                             <a:srgbClr val="1A1A1A"/>
                           </a:solidFill>
                           <a:latin typeface="Calibri"/>
                         </a:rPr>
-                        <a:t>EUR 2,130</a:t>
+                        <a:t>EUR 1,397</a:t>
+                      </a:r>
+                    </a:p>
+                  </a:txBody>
+                  <a:tcPr anchor="ctr" marL="73152" marR="73152">
+                    <a:solidFill>
+                      <a:srgbClr val="ECECEC"/>
+                    </a:solidFill>
+                  </a:tcPr>
+                </a:tc>
+                <a:tc>
+                  <a:txBody>
+                    <a:bodyPr/>
+                    <a:lstStyle/>
+                    <a:p>
+                      <a:pPr algn="r"/>
+                      <a:r>
+                        <a:rPr sz="1100" b="0">
+                          <a:solidFill>
+                            <a:srgbClr val="1A1A1A"/>
+                          </a:solidFill>
+                          <a:latin typeface="Calibri"/>
+                        </a:rPr>
+                        <a:t>EUR 1,178</a:t>
                       </a:r>
                     </a:p>
                   </a:txBody>
@@ -13782,13 +14322,13 @@
                     <a:p>
                       <a:pPr algn="l"/>
                       <a:r>
-                        <a:rPr sz="1200" b="0">
+                        <a:rPr sz="1100" b="0">
                           <a:solidFill>
                             <a:srgbClr val="1A1A1A"/>
                           </a:solidFill>
                           <a:latin typeface="Calibri"/>
                         </a:rPr>
-                        <a:t>8983320160</a:t>
+                        <a:t>8978249035</a:t>
                       </a:r>
                     </a:p>
                   </a:txBody>
@@ -13805,13 +14345,36 @@
                     <a:p>
                       <a:pPr algn="l"/>
                       <a:r>
-                        <a:rPr sz="1200" b="0">
+                        <a:rPr sz="1100" b="0">
                           <a:solidFill>
                             <a:srgbClr val="1A1A1A"/>
                           </a:solidFill>
                           <a:latin typeface="Calibri"/>
                         </a:rPr>
-                        <a:t>VALVE; EGR</a:t>
+                        <a:t>LAMP ASM; HEAD</a:t>
+                      </a:r>
+                    </a:p>
+                  </a:txBody>
+                  <a:tcPr anchor="ctr" marL="73152" marR="73152">
+                    <a:solidFill>
+                      <a:srgbClr val="FFFFFF"/>
+                    </a:solidFill>
+                  </a:tcPr>
+                </a:tc>
+                <a:tc>
+                  <a:txBody>
+                    <a:bodyPr/>
+                    <a:lstStyle/>
+                    <a:p>
+                      <a:pPr algn="l"/>
+                      <a:r>
+                        <a:rPr sz="1100" b="0">
+                          <a:solidFill>
+                            <a:srgbClr val="1A1A1A"/>
+                          </a:solidFill>
+                          <a:latin typeface="Calibri"/>
+                        </a:rPr>
+                        <a:t>—</a:t>
                       </a:r>
                     </a:p>
                   </a:txBody>
@@ -13828,13 +14391,13 @@
                     <a:p>
                       <a:pPr algn="r"/>
                       <a:r>
-                        <a:rPr sz="1200" b="0">
+                        <a:rPr sz="1100" b="0">
                           <a:solidFill>
                             <a:srgbClr val="1A1A1A"/>
                           </a:solidFill>
                           <a:latin typeface="Calibri"/>
                         </a:rPr>
-                        <a:t>EUR 220</a:t>
+                        <a:t>EUR 338</a:t>
                       </a:r>
                     </a:p>
                   </a:txBody>
@@ -13851,13 +14414,36 @@
                     <a:p>
                       <a:pPr algn="r"/>
                       <a:r>
-                        <a:rPr sz="1200" b="0">
+                        <a:rPr sz="1100" b="0">
                           <a:solidFill>
                             <a:srgbClr val="1A1A1A"/>
                           </a:solidFill>
                           <a:latin typeface="Calibri"/>
                         </a:rPr>
-                        <a:t>EUR 1,397</a:t>
+                        <a:t>EUR 1,313</a:t>
+                      </a:r>
+                    </a:p>
+                  </a:txBody>
+                  <a:tcPr anchor="ctr" marL="73152" marR="73152">
+                    <a:solidFill>
+                      <a:srgbClr val="FFFFFF"/>
+                    </a:solidFill>
+                  </a:tcPr>
+                </a:tc>
+                <a:tc>
+                  <a:txBody>
+                    <a:bodyPr/>
+                    <a:lstStyle/>
+                    <a:p>
+                      <a:pPr algn="r"/>
+                      <a:r>
+                        <a:rPr sz="1100" b="0">
+                          <a:solidFill>
+                            <a:srgbClr val="1A1A1A"/>
+                          </a:solidFill>
+                          <a:latin typeface="Calibri"/>
+                        </a:rPr>
+                        <a:t>EUR 975</a:t>
                       </a:r>
                     </a:p>
                   </a:txBody>
@@ -13876,13 +14462,13 @@
                     <a:p>
                       <a:pPr algn="l"/>
                       <a:r>
-                        <a:rPr sz="1200" b="0">
+                        <a:rPr sz="1100" b="0">
                           <a:solidFill>
                             <a:srgbClr val="1A1A1A"/>
                           </a:solidFill>
                           <a:latin typeface="Calibri"/>
                         </a:rPr>
-                        <a:t>8978249035</a:t>
+                        <a:t>5876150530</a:t>
                       </a:r>
                     </a:p>
                   </a:txBody>
@@ -13899,13 +14485,36 @@
                     <a:p>
                       <a:pPr algn="l"/>
                       <a:r>
-                        <a:rPr sz="1200" b="0">
+                        <a:rPr sz="1100" b="0">
                           <a:solidFill>
                             <a:srgbClr val="1A1A1A"/>
                           </a:solidFill>
                           <a:latin typeface="Calibri"/>
                         </a:rPr>
-                        <a:t>LAMP ASM; HEAD</a:t>
+                        <a:t>ELEMENT; OIL FILTER</a:t>
+                      </a:r>
+                    </a:p>
+                  </a:txBody>
+                  <a:tcPr anchor="ctr" marL="73152" marR="73152">
+                    <a:solidFill>
+                      <a:srgbClr val="ECECEC"/>
+                    </a:solidFill>
+                  </a:tcPr>
+                </a:tc>
+                <a:tc>
+                  <a:txBody>
+                    <a:bodyPr/>
+                    <a:lstStyle/>
+                    <a:p>
+                      <a:pPr algn="l"/>
+                      <a:r>
+                        <a:rPr sz="1100" b="0">
+                          <a:solidFill>
+                            <a:srgbClr val="1A1A1A"/>
+                          </a:solidFill>
+                          <a:latin typeface="Calibri"/>
+                        </a:rPr>
+                        <a:t>NHR,NLR,NMR,TF*,</a:t>
                       </a:r>
                     </a:p>
                   </a:txBody>
@@ -13922,13 +14531,13 @@
                     <a:p>
                       <a:pPr algn="r"/>
                       <a:r>
-                        <a:rPr sz="1200" b="0">
+                        <a:rPr sz="1100" b="0">
                           <a:solidFill>
                             <a:srgbClr val="1A1A1A"/>
                           </a:solidFill>
                           <a:latin typeface="Calibri"/>
                         </a:rPr>
-                        <a:t>EUR 338</a:t>
+                        <a:t>EUR 51</a:t>
                       </a:r>
                     </a:p>
                   </a:txBody>
@@ -13945,13 +14554,36 @@
                     <a:p>
                       <a:pPr algn="r"/>
                       <a:r>
-                        <a:rPr sz="1200" b="0">
+                        <a:rPr sz="1100" b="0">
                           <a:solidFill>
                             <a:srgbClr val="1A1A1A"/>
                           </a:solidFill>
                           <a:latin typeface="Calibri"/>
                         </a:rPr>
-                        <a:t>EUR 1,313</a:t>
+                        <a:t>EUR 857</a:t>
+                      </a:r>
+                    </a:p>
+                  </a:txBody>
+                  <a:tcPr anchor="ctr" marL="73152" marR="73152">
+                    <a:solidFill>
+                      <a:srgbClr val="ECECEC"/>
+                    </a:solidFill>
+                  </a:tcPr>
+                </a:tc>
+                <a:tc>
+                  <a:txBody>
+                    <a:bodyPr/>
+                    <a:lstStyle/>
+                    <a:p>
+                      <a:pPr algn="r"/>
+                      <a:r>
+                        <a:rPr sz="1100" b="0">
+                          <a:solidFill>
+                            <a:srgbClr val="1A1A1A"/>
+                          </a:solidFill>
+                          <a:latin typeface="Calibri"/>
+                        </a:rPr>
+                        <a:t>EUR 806</a:t>
                       </a:r>
                     </a:p>
                   </a:txBody>
@@ -14012,7 +14644,7 @@
                 </a:solidFill>
                 <a:latin typeface="Calibri"/>
               </a:rPr>
-              <a:t>Air conditioning +39%, Electrical sensors +20%, Body parts +9% — where the volume went.</a:t>
+              <a:t>Air conditioning +37%, Body parts +12%, Fuel system +553% — where the commercial volume went.</a:t>
             </a:r>
           </a:p>
           <a:p>
@@ -14040,7 +14672,7 @@
                 </a:solidFill>
                 <a:latin typeface="Calibri"/>
               </a:rPr>
-              <a:t>Several of these are the kind of item that also moves on a campaign or claim. Hungary CY2025 warranty parts (claim-price basis) were EUR 77K — separate from fiscal GPS warranty expense. Do not read this growth list as purely commercial without checking claims together.</a:t>
+              <a:t>Claim-matched PNs (87 distinct) and campaign/recall text matches are already excluded from this growth list. Residual warranty on unmapped PNs can remain.</a:t>
             </a:r>
           </a:p>
           <a:p>
@@ -14068,7 +14700,7 @@
                 </a:solidFill>
                 <a:latin typeface="Calibri"/>
               </a:rPr>
-              <a:t>Worth agreeing which of these are repeatable and which were one-off.</a:t>
+              <a:t>PNs ranked by largest EUR increase (prior-period sales &gt; 0). Worth agreeing which of these are repeatable and which were one-off.</a:t>
             </a:r>
           </a:p>
         </p:txBody>
@@ -14609,7 +15241,7 @@
                           </a:solidFill>
                           <a:latin typeface="Calibri"/>
                         </a:rPr>
-                        <a:t>Validate</a:t>
+                        <a:t>Warranty / campaign</a:t>
                       </a:r>
                     </a:p>
                   </a:txBody>

--- a/09_meetings/HUNGARY_Sales_Review_2026/ISZE_HUNGARY_Sales_Review_FY2027_ModeA_only.pptx
+++ b/09_meetings/HUNGARY_Sales_Review_2026/ISZE_HUNGARY_Sales_Review_FY2027_ModeA_only.pptx
@@ -3964,8 +3964,8 @@
         </p:blipFill>
         <p:spPr>
           <a:xfrm>
-            <a:off x="292608" y="2050572"/>
-            <a:ext cx="7178040" cy="3168335"/>
+            <a:off x="292608" y="2051349"/>
+            <a:ext cx="7178040" cy="3166782"/>
           </a:xfrm>
           <a:prstGeom prst="rect">
             <a:avLst/>
@@ -4343,7 +4343,7 @@
                 </a:solidFill>
                 <a:latin typeface="Calibri"/>
               </a:rPr>
-              <a:t>IDS 2026: Hungary averages 86.2%, above the 74.8% network benchmark</a:t>
+              <a:t>IDS 2026: Hungary 86.2% vs 74.8% network</a:t>
             </a:r>
           </a:p>
         </p:txBody>
@@ -5385,7 +5385,7 @@
                 </a:solidFill>
                 <a:latin typeface="Calibri"/>
               </a:rPr>
-              <a:t>The fleet is expected to decline in 2026</a:t>
+              <a:t>The fleet is expected to grow in 2026</a:t>
             </a:r>
           </a:p>
         </p:txBody>
@@ -5484,8 +5484,8 @@
         </p:blipFill>
         <p:spPr>
           <a:xfrm>
-            <a:off x="292608" y="2120980"/>
-            <a:ext cx="7178040" cy="3027520"/>
+            <a:off x="292608" y="2121722"/>
+            <a:ext cx="7178040" cy="3026036"/>
           </a:xfrm>
           <a:prstGeom prst="rect">
             <a:avLst/>
@@ -5616,7 +5616,7 @@
                 </a:solidFill>
                 <a:latin typeface="Calibri"/>
               </a:rPr>
-              <a:t>Fleet size (calendar year): 3,734 vehicles in 2025 → 3,645 working estimate for end-2026 (-2.4%).</a:t>
+              <a:t>Fleet size (calendar year): 3,734 vehicles in 2025 → 3,992 working estimate for end-2026 (+6.9%).</a:t>
             </a:r>
           </a:p>
           <a:p>
@@ -5672,7 +5672,7 @@
                 </a:solidFill>
                 <a:latin typeface="Calibri"/>
               </a:rPr>
-              <a:t>End-2026 mix: LCV / D-Max 3,645; CV — LD 0.</a:t>
+              <a:t>End-2026 mix: LCV / D-Max 3,992; CV — LD 0.</a:t>
             </a:r>
           </a:p>
           <a:p>
@@ -5700,7 +5700,7 @@
                 </a:solidFill>
                 <a:latin typeface="Calibri"/>
               </a:rPr>
-              <a:t>The FY2027 Sales-to-Dealer target starts from that fleet change, then applies a 5% price adjustment and 1.8% additional growth.</a:t>
+              <a:t>That fleet growth feeds the FY2027 Extended Target's max-spend potential (EUR 920,328), which the base plan plus stretch is measured against.</a:t>
             </a:r>
           </a:p>
           <a:p>
@@ -5728,7 +5728,7 @@
                 </a:solidFill>
                 <a:latin typeface="Calibri"/>
               </a:rPr>
-              <a:t>So the target is built from a slightly smaller fleet — not from an assumed growth story.</a:t>
+              <a:t>The target reflects the working fleet outlook without extending the chart beyond 2026.</a:t>
             </a:r>
           </a:p>
         </p:txBody>
@@ -6004,7 +6004,7 @@
                 </a:solidFill>
                 <a:latin typeface="Calibri"/>
               </a:rPr>
-              <a:t>Sales-to-Dealer amount bridge</a:t>
+              <a:t>ISZE → AutoWallis Extended Target bridge</a:t>
             </a:r>
           </a:p>
         </p:txBody>
@@ -6019,7 +6019,7 @@
         </p:nvGraphicFramePr>
         <p:xfrm>
           <a:off x="292608" y="1508760"/>
-          <a:ext cx="8595360" cy="2148840"/>
+          <a:ext cx="8595360" cy="1737360"/>
         </p:xfrm>
         <a:graphic>
           <a:graphicData uri="http://schemas.openxmlformats.org/drawingml/2006/table">
@@ -6031,7 +6031,7 @@
                 <a:gridCol w="5669280"/>
                 <a:gridCol w="2926080"/>
               </a:tblGrid>
-              <a:tr h="429768">
+              <a:tr h="434340">
                 <a:tc>
                   <a:txBody>
                     <a:bodyPr/>
@@ -6079,7 +6079,7 @@
                   </a:tcPr>
                 </a:tc>
               </a:tr>
-              <a:tr h="429768">
+              <a:tr h="434340">
                 <a:tc>
                   <a:txBody>
                     <a:bodyPr/>
@@ -6093,7 +6093,7 @@
                           </a:solidFill>
                           <a:latin typeface="Calibri"/>
                         </a:rPr>
-                        <a:t>FY2026 Sales-to-Dealer (working estimate)</a:t>
+                        <a:t>FY2026 ISZE billing (actual)</a:t>
                       </a:r>
                     </a:p>
                   </a:txBody>
@@ -6116,7 +6116,7 @@
                           </a:solidFill>
                           <a:latin typeface="Calibri"/>
                         </a:rPr>
-                        <a:t>EUR 532,687</a:t>
+                        <a:t>EUR 346,246</a:t>
                       </a:r>
                     </a:p>
                   </a:txBody>
@@ -6127,7 +6127,7 @@
                   </a:tcPr>
                 </a:tc>
               </a:tr>
-              <a:tr h="429768">
+              <a:tr h="434340">
                 <a:tc>
                   <a:txBody>
                     <a:bodyPr/>
@@ -6141,7 +6141,7 @@
                           </a:solidFill>
                           <a:latin typeface="Calibri"/>
                         </a:rPr>
-                        <a:t>After fleet movement (-2.4%)</a:t>
+                        <a:t>FY2027 base plan (BP FY27, reviewed with ISZE)</a:t>
                       </a:r>
                     </a:p>
                   </a:txBody>
@@ -6164,7 +6164,7 @@
                           </a:solidFill>
                           <a:latin typeface="Calibri"/>
                         </a:rPr>
-                        <a:t>EUR 519,990</a:t>
+                        <a:t>EUR 349,600</a:t>
                       </a:r>
                     </a:p>
                   </a:txBody>
@@ -6175,55 +6175,7 @@
                   </a:tcPr>
                 </a:tc>
               </a:tr>
-              <a:tr h="429768">
-                <a:tc>
-                  <a:txBody>
-                    <a:bodyPr/>
-                    <a:lstStyle/>
-                    <a:p>
-                      <a:pPr algn="l"/>
-                      <a:r>
-                        <a:rPr sz="1250" b="0">
-                          <a:solidFill>
-                            <a:srgbClr val="1A1A1A"/>
-                          </a:solidFill>
-                          <a:latin typeface="Calibri"/>
-                        </a:rPr>
-                        <a:t>After price adjustment (+5%)</a:t>
-                      </a:r>
-                    </a:p>
-                  </a:txBody>
-                  <a:tcPr anchor="ctr" marL="73152" marR="73152">
-                    <a:solidFill>
-                      <a:srgbClr val="FFFFFF"/>
-                    </a:solidFill>
-                  </a:tcPr>
-                </a:tc>
-                <a:tc>
-                  <a:txBody>
-                    <a:bodyPr/>
-                    <a:lstStyle/>
-                    <a:p>
-                      <a:pPr algn="r"/>
-                      <a:r>
-                        <a:rPr sz="1250" b="0">
-                          <a:solidFill>
-                            <a:srgbClr val="1A1A1A"/>
-                          </a:solidFill>
-                          <a:latin typeface="Calibri"/>
-                        </a:rPr>
-                        <a:t>EUR 545,989</a:t>
-                      </a:r>
-                    </a:p>
-                  </a:txBody>
-                  <a:tcPr anchor="ctr" marL="73152" marR="73152">
-                    <a:solidFill>
-                      <a:srgbClr val="FFFFFF"/>
-                    </a:solidFill>
-                  </a:tcPr>
-                </a:tc>
-              </a:tr>
-              <a:tr h="429768">
+              <a:tr h="434340">
                 <a:tc>
                   <a:txBody>
                     <a:bodyPr/>
@@ -6237,7 +6189,7 @@
                           </a:solidFill>
                           <a:latin typeface="Calibri"/>
                         </a:rPr>
-                        <a:t>FY2027 target after additional growth (+1.8%)</a:t>
+                        <a:t>After stretch (+1.8% of EUR 920,328 fleet potential)</a:t>
                       </a:r>
                     </a:p>
                   </a:txBody>
@@ -6260,7 +6212,7 @@
                           </a:solidFill>
                           <a:latin typeface="Calibri"/>
                         </a:rPr>
-                        <a:t>EUR 555,817</a:t>
+                        <a:t>EUR 366,166</a:t>
                       </a:r>
                     </a:p>
                   </a:txBody>
@@ -6283,8 +6235,8 @@
         </p:nvSpPr>
         <p:spPr>
           <a:xfrm>
-            <a:off x="292608" y="3977639"/>
-            <a:ext cx="11612880" cy="1188720"/>
+            <a:off x="292608" y="3429000"/>
+            <a:ext cx="11612880" cy="1737360"/>
           </a:xfrm>
           <a:prstGeom prst="rect">
             <a:avLst/>
@@ -6321,7 +6273,7 @@
                 </a:solidFill>
                 <a:latin typeface="Calibri"/>
               </a:rPr>
-              <a:t>The FY2027 target is +4.3% versus the FY2026 Sales-to-Dealer base.</a:t>
+              <a:t>The Extended Target is +5.8% versus FY2026 ISZE billing.</a:t>
             </a:r>
           </a:p>
           <a:p>
@@ -6349,7 +6301,35 @@
                 </a:solidFill>
                 <a:latin typeface="Calibri"/>
               </a:rPr>
-              <a:t>The FY2026 base is a working estimate (ISZE billing ÷ 0.65): the KPI Dashboard has no usable Sales-to-Dealer row for this market.</a:t>
+              <a:t>This bridge is the ISZE→AutoWallis commercial track — a separate figure from what you sell on to your own dealers, which this deck does not target this cycle.</a:t>
+            </a:r>
+          </a:p>
+          <a:p>
+            <a:pPr>
+              <a:lnSpc>
+                <a:spcPct val="125000"/>
+              </a:lnSpc>
+              <a:spcAft>
+                <a:spcPts val="1000"/>
+              </a:spcAft>
+            </a:pPr>
+            <a:r>
+              <a:rPr sz="1300" b="1">
+                <a:solidFill>
+                  <a:srgbClr val="CC0E1E"/>
+                </a:solidFill>
+                <a:latin typeface="Calibri"/>
+              </a:rPr>
+              <a:t>—  </a:t>
+            </a:r>
+            <a:r>
+              <a:rPr sz="1300">
+                <a:solidFill>
+                  <a:srgbClr val="1A1A1A"/>
+                </a:solidFill>
+                <a:latin typeface="Calibri"/>
+              </a:rPr>
+              <a:t>ISZE management has submitted a financial incentive tied to reaching the stretch portion of this target — not yet approved by Japan.</a:t>
             </a:r>
           </a:p>
         </p:txBody>
@@ -6724,7 +6704,7 @@
                 </a:solidFill>
                 <a:latin typeface="Calibri"/>
               </a:rPr>
-              <a:t>Your fleet</a:t>
+              <a:t>Your fleet potential</a:t>
             </a:r>
           </a:p>
         </p:txBody>
@@ -6775,7 +6755,7 @@
                 </a:solidFill>
                 <a:latin typeface="Calibri"/>
               </a:rPr>
-              <a:t>The working fleet movement used in the target is -2.4%.</a:t>
+              <a:t>Max spend for FY2027 is EUR 920,328 — 3,992 units × the FY27 ISZE-net rate (FY26 rate +5%).</a:t>
             </a:r>
           </a:p>
         </p:txBody>
@@ -6909,7 +6889,7 @@
                 </a:solidFill>
                 <a:latin typeface="Calibri"/>
               </a:rPr>
-              <a:t>The price move</a:t>
+              <a:t>The stretch ask</a:t>
             </a:r>
           </a:p>
         </p:txBody>
@@ -6960,7 +6940,7 @@
                 </a:solidFill>
                 <a:latin typeface="Calibri"/>
               </a:rPr>
-              <a:t>ISZE is applying a 5% price adjustment for FY2027, consistent with every ISZE market this year.</a:t>
+              <a:t>ISZE is asking for a 1.8% stretch on top of the base plan — EUR 16,566.</a:t>
             </a:r>
           </a:p>
           <a:p>
@@ -6988,7 +6968,7 @@
                 </a:solidFill>
                 <a:latin typeface="Calibri"/>
               </a:rPr>
-              <a:t>It is built into the per-vehicle rate above, not added separately on top.</a:t>
+              <a:t>That lifts your GPS share from 38.0% to 39.8% of fleet potential.</a:t>
             </a:r>
           </a:p>
         </p:txBody>
@@ -7112,7 +7092,7 @@
                           </a:solidFill>
                           <a:latin typeface="Calibri"/>
                         </a:rPr>
-                        <a:t>FY2027 Sales-to-Dealer target</a:t>
+                        <a:t>FY2027 Extended Target</a:t>
                       </a:r>
                     </a:p>
                   </a:txBody>
@@ -7135,7 +7115,7 @@
                           </a:solidFill>
                           <a:latin typeface="Calibri"/>
                         </a:rPr>
-                        <a:t>EUR 555,817</a:t>
+                        <a:t>EUR 366,166</a:t>
                       </a:r>
                     </a:p>
                   </a:txBody>
@@ -7160,7 +7140,7 @@
                           </a:solidFill>
                           <a:latin typeface="Calibri"/>
                         </a:rPr>
-                        <a:t>vs FY2026 Sales-to-Dealer (EUR 532,687)</a:t>
+                        <a:t>vs FY2026 ISZE billing (EUR 346,246)</a:t>
                       </a:r>
                     </a:p>
                   </a:txBody>
@@ -7183,7 +7163,7 @@
                           </a:solidFill>
                           <a:latin typeface="Calibri"/>
                         </a:rPr>
-                        <a:t>+4.3%</a:t>
+                        <a:t>+5.8%</a:t>
                       </a:r>
                     </a:p>
                   </a:txBody>
@@ -7244,7 +7224,7 @@
                 </a:solidFill>
                 <a:latin typeface="Calibri"/>
               </a:rPr>
-              <a:t>As in previous cycles we would expect an incentive to sit alongside this adjustment — that approval is still pending on our side.</a:t>
+              <a:t>ISZE management has submitted a financial incentive tied to reaching this stretch target for FY2027 — not yet approved by Japan. We'll confirm as soon as that's through.</a:t>
             </a:r>
           </a:p>
           <a:p>
@@ -7272,7 +7252,7 @@
                 </a:solidFill>
                 <a:latin typeface="Calibri"/>
               </a:rPr>
-              <a:t>Until the incentive is confirmed, treat the FY2027 target as the working bridge (fleet × price × additional growth), not a locked commercial commitment.</a:t>
+              <a:t>Until the incentive is confirmed, treat the Extended Target as the working bridge (base plan + stretch), not a locked commercial commitment.</a:t>
             </a:r>
           </a:p>
         </p:txBody>
@@ -10190,7 +10170,7 @@
                 </a:solidFill>
                 <a:latin typeface="Calibri"/>
               </a:rPr>
-              <a:t>Align on the FY2027 Sales-to-Dealer bridge (fleet, price, additional growth) — working figure EUR 555,817 (+4.3% vs FY2026 base).</a:t>
+              <a:t>Align on the FY2027 Extended Target (base plan + stretch) — working figure EUR 366,166 (+5.8% vs FY2026 ISZE billing).</a:t>
             </a:r>
           </a:p>
           <a:p>
@@ -10218,7 +10198,7 @@
                 </a:solidFill>
                 <a:latin typeface="Calibri"/>
               </a:rPr>
-              <a:t>Confirm the incentive alongside the price adjustment; lock the target once that approval is through.</a:t>
+              <a:t>Confirm the incentive tied to the stretch target once approved by Japan.</a:t>
             </a:r>
           </a:p>
           <a:p>
@@ -10790,7 +10770,7 @@
                 </a:solidFill>
                 <a:latin typeface="Calibri"/>
               </a:rPr>
-              <a:t>Sales-to-Dealer Outlook</a:t>
+              <a:t>FY2027 Extended Target — ISZE to HUNGARY</a:t>
             </a:r>
           </a:p>
           <a:p>
@@ -11404,8 +11384,8 @@
         </p:blipFill>
         <p:spPr>
           <a:xfrm>
-            <a:off x="292608" y="2120980"/>
-            <a:ext cx="7178040" cy="3027520"/>
+            <a:off x="292608" y="2121722"/>
+            <a:ext cx="7178040" cy="3026036"/>
           </a:xfrm>
           <a:prstGeom prst="rect">
             <a:avLst/>
@@ -11564,7 +11544,7 @@
                 </a:solidFill>
                 <a:latin typeface="Calibri"/>
               </a:rPr>
-              <a:t>Largest PN drops: 8983767550 (ROTOR; DISC BRK,FRT) EUR -6K, 79 fewer pcs; 8977993753 (LAMP ASM; HEAD) EUR -3K, 9 fewer pcs; 8975546610 (PAD KIT; CALIPER,DIS) [TF*] EUR -2K, 21 fewer pcs.</a:t>
+              <a:t>Largest PN drops (all categories): 8983767550 (ROTOR; DISC BRK,FRT) EUR -6K, 79 fewer pcs; 8977993753 (LAMP ASM; HEAD) EUR -3K, 9 fewer pcs; 8975546610 (PAD KIT; CALIPER,DIS) [TF*] EUR -2K, 21 fewer pcs.</a:t>
             </a:r>
           </a:p>
           <a:p>
@@ -11592,7 +11572,7 @@
                 </a:solidFill>
                 <a:latin typeface="Calibri"/>
               </a:rPr>
-              <a:t>Largest PN gains: 8974995480 (FILTER; ACL) [TFR,TFS,UCR,UCS] EUR 3K, 154 more pcs; 1884057520 (T AXLE OIL  20L) EUR 2K, 14 more pcs; 8975595830 (PANEL; SIDE GATE) EUR 2K, 8 more pcs.</a:t>
+              <a:t>Largest PN gains (all categories): 8974995480 (FILTER; ACL) [TFR,TFS,UCR,UCS] EUR 3K, 154 more pcs; 1884057520 (T AXLE OIL  20L) EUR 2K, 14 more pcs; 8975595830 (PANEL; SIDE GATE) EUR 2K, 8 more pcs.</a:t>
             </a:r>
           </a:p>
           <a:p>
@@ -11620,7 +11600,7 @@
                 </a:solidFill>
                 <a:latin typeface="Calibri"/>
               </a:rPr>
-              <a:t>Credit notes of EUR 1K stay on the net bridge (net EUR 170K); not in the movers.</a:t>
+              <a:t>Within Air conditioning (EUR 5K, +37%): 8974995480 (FILTER; ACL) [TFR,TFS,UCR,UCS] EUR 3K, 154 more pcs; 8975554500 (FILTER; BLOWER UNIT) [TF*,UC*] EUR 1K, 51 more pcs; 8981569021 (CONTROL SUB ASM; HTR) EUR 0K.</a:t>
             </a:r>
           </a:p>
         </p:txBody>
@@ -15834,7 +15814,7 @@
                 </a:solidFill>
                 <a:latin typeface="Calibri"/>
               </a:rPr>
-              <a:t>SALES-TO-DEALER</a:t>
+              <a:t>FY2027 EXTENDED TARGET</a:t>
             </a:r>
           </a:p>
         </p:txBody>
@@ -15869,7 +15849,7 @@
                 </a:solidFill>
                 <a:latin typeface="Calibri"/>
               </a:rPr>
-              <a:t>Sales-to-Dealer outlook — FY2027</a:t>
+              <a:t>FY2027 Extended Target: EUR 366,166</a:t>
             </a:r>
           </a:p>
         </p:txBody>
@@ -15961,7 +15941,7 @@
         <p:spPr>
           <a:xfrm>
             <a:off x="292608" y="1234440"/>
-            <a:ext cx="10881360" cy="3840480"/>
+            <a:ext cx="10881360" cy="4023360"/>
           </a:xfrm>
           <a:prstGeom prst="rect">
             <a:avLst/>
@@ -15998,7 +15978,7 @@
                 </a:solidFill>
                 <a:latin typeface="Calibri"/>
               </a:rPr>
-              <a:t>FY2026 Sales-to-Dealer is EUR 532,687 (working estimate).</a:t>
+              <a:t>FY2026 ISZE billing was EUR 346,246. The FY2027 base plan is EUR 349,600, plus a 1.8% stretch (EUR 16,566) — EUR 366,166 in total, +5.8% versus FY2026.</a:t>
             </a:r>
           </a:p>
           <a:p>
@@ -16026,7 +16006,7 @@
                 </a:solidFill>
                 <a:latin typeface="Calibri"/>
               </a:rPr>
-              <a:t>The working fleet movement into FY2027 is -2.4%.</a:t>
+              <a:t>That stretch lifts your GPS share of fleet potential from 38.0% to 39.8%.</a:t>
             </a:r>
           </a:p>
           <a:p>
@@ -16054,7 +16034,7 @@
                 </a:solidFill>
                 <a:latin typeface="Calibri"/>
               </a:rPr>
-              <a:t>Applying fleet movement, the 5% price adjustment and 1.8% additional growth gives a FY2027 Sales-to-Dealer target of EUR 555,817.</a:t>
+              <a:t>This is the ISZE→AutoWallis commercial target — separate from what you sell on to your own dealers.</a:t>
             </a:r>
           </a:p>
           <a:p>
@@ -16082,7 +16062,7 @@
                 </a:solidFill>
                 <a:latin typeface="Calibri"/>
               </a:rPr>
-              <a:t>The discussion is held in Sales-to-Dealer amounts; ISZE billing remains an internal reconciliation measure.</a:t>
+              <a:t>ISZE management has submitted a financial incentive tied to reaching this stretch target for FY2027 — not yet approved by Japan. We'll confirm as soon as that's through.</a:t>
             </a:r>
           </a:p>
         </p:txBody>
